--- a/ws52/Claude Desktop - od dat k manažerským závěrům bez jediného řádku kódu.pptx
+++ b/ws52/Claude Desktop - od dat k manažerským závěrům bez jediného řádku kódu.pptx
@@ -5,10 +5,10 @@
     <p:sldMasterId id="2147483660" r:id="rId4"/>
   </p:sldMasterIdLst>
   <p:notesMasterIdLst>
-    <p:notesMasterId r:id="rId12"/>
+    <p:notesMasterId r:id="rId14"/>
   </p:notesMasterIdLst>
   <p:handoutMasterIdLst>
-    <p:handoutMasterId r:id="rId13"/>
+    <p:handoutMasterId r:id="rId15"/>
   </p:handoutMasterIdLst>
   <p:sldIdLst>
     <p:sldId id="298" r:id="rId5"/>
@@ -17,7 +17,9 @@
     <p:sldId id="401" r:id="rId8"/>
     <p:sldId id="394" r:id="rId9"/>
     <p:sldId id="402" r:id="rId10"/>
-    <p:sldId id="403" r:id="rId11"/>
+    <p:sldId id="405" r:id="rId11"/>
+    <p:sldId id="406" r:id="rId12"/>
+    <p:sldId id="403" r:id="rId13"/>
   </p:sldIdLst>
   <p:sldSz cx="12192000" cy="6858000"/>
   <p:notesSz cx="7099300" cy="10234613"/>
@@ -137,6 +139,50 @@
     </p:extLst>
   </p:cmAuthor>
 </p:cmAuthorLst>
+</file>
+
+<file path=ppt/revisionInfo.xml><?xml version="1.0" encoding="utf-8"?>
+<p1510:revInfo xmlns:a="http://schemas.openxmlformats.org/drawingml/2006/main" xmlns:r="http://schemas.openxmlformats.org/officeDocument/2006/relationships" xmlns:p1510="http://schemas.microsoft.com/office/powerpoint/2015/10/main">
+  <p1510:revLst>
+    <p1510:client id="{DE32E1E8-B0B1-4920-98A9-5FF98C270183}" v="1" dt="2026-03-16T16:58:52.972"/>
+  </p1510:revLst>
+</p1510:revInfo>
+</file>
+
+<file path=ppt/changesInfos/changesInfo1.xml><?xml version="1.0" encoding="utf-8"?>
+<pc:chgInfo xmlns:a="http://schemas.openxmlformats.org/drawingml/2006/main" xmlns:r="http://schemas.openxmlformats.org/officeDocument/2006/relationships" xmlns:ac="http://schemas.microsoft.com/office/drawing/2013/main/command" xmlns:pc="http://schemas.microsoft.com/office/powerpoint/2013/main/command">
+  <pc:docChgLst>
+    <pc:chgData name="Petr Rozkosny" userId="01d6b2290d8cdeaa" providerId="LiveId" clId="{7058E744-1A82-4B1D-B6A9-9272A99F4EA7}"/>
+    <pc:docChg chg="custSel addSld modSld">
+      <pc:chgData name="Petr Rozkosny" userId="01d6b2290d8cdeaa" providerId="LiveId" clId="{7058E744-1A82-4B1D-B6A9-9272A99F4EA7}" dt="2026-03-16T17:00:11.441" v="12" actId="20577"/>
+      <pc:docMkLst>
+        <pc:docMk/>
+      </pc:docMkLst>
+      <pc:sldChg chg="add">
+        <pc:chgData name="Petr Rozkosny" userId="01d6b2290d8cdeaa" providerId="LiveId" clId="{7058E744-1A82-4B1D-B6A9-9272A99F4EA7}" dt="2026-03-16T16:58:52.968" v="0"/>
+        <pc:sldMkLst>
+          <pc:docMk/>
+          <pc:sldMk cId="100043114" sldId="405"/>
+        </pc:sldMkLst>
+      </pc:sldChg>
+      <pc:sldChg chg="modSp add mod">
+        <pc:chgData name="Petr Rozkosny" userId="01d6b2290d8cdeaa" providerId="LiveId" clId="{7058E744-1A82-4B1D-B6A9-9272A99F4EA7}" dt="2026-03-16T17:00:11.441" v="12" actId="20577"/>
+        <pc:sldMkLst>
+          <pc:docMk/>
+          <pc:sldMk cId="4134111022" sldId="406"/>
+        </pc:sldMkLst>
+        <pc:spChg chg="mod">
+          <ac:chgData name="Petr Rozkosny" userId="01d6b2290d8cdeaa" providerId="LiveId" clId="{7058E744-1A82-4B1D-B6A9-9272A99F4EA7}" dt="2026-03-16T17:00:11.441" v="12" actId="20577"/>
+          <ac:spMkLst>
+            <pc:docMk/>
+            <pc:sldMk cId="4134111022" sldId="406"/>
+            <ac:spMk id="4" creationId="{DD98E92E-BF7E-7DCD-B61B-F7D1B1B6AC6A}"/>
+          </ac:spMkLst>
+        </pc:spChg>
+      </pc:sldChg>
+    </pc:docChg>
+  </pc:docChgLst>
+</pc:chgInfo>
 </file>
 
 <file path=ppt/handoutMasters/handoutMaster1.xml><?xml version="1.0" encoding="utf-8"?>
@@ -10884,7 +10930,7 @@
           <p:cNvPr id="2" name="Slide Number Placeholder 1">
             <a:extLst>
               <a:ext uri="{FF2B5EF4-FFF2-40B4-BE49-F238E27FC236}">
-                <a16:creationId xmlns:a16="http://schemas.microsoft.com/office/drawing/2014/main" id="{26CD56B6-34BA-477A-1A8A-EB426A9560D5}"/>
+                <a16:creationId xmlns:a16="http://schemas.microsoft.com/office/drawing/2014/main" id="{86C40DAB-721B-B563-2AD0-51191A6F3A07}"/>
               </a:ext>
             </a:extLst>
           </p:cNvPr>
@@ -10903,6 +10949,1179 @@
             <a:fld id="{739B250B-A78B-470B-9267-5328930F7291}" type="slidenum">
               <a:rPr lang="cs-CZ" smtClean="0"/>
               <a:t>7</a:t>
+            </a:fld>
+            <a:endParaRPr lang="cs-CZ"/>
+          </a:p>
+        </p:txBody>
+      </p:sp>
+      <p:sp>
+        <p:nvSpPr>
+          <p:cNvPr id="3" name="Footer Placeholder 2">
+            <a:extLst>
+              <a:ext uri="{FF2B5EF4-FFF2-40B4-BE49-F238E27FC236}">
+                <a16:creationId xmlns:a16="http://schemas.microsoft.com/office/drawing/2014/main" id="{57CE38BC-4C6D-6DBD-4756-4DB1DB365066}"/>
+              </a:ext>
+            </a:extLst>
+          </p:cNvPr>
+          <p:cNvSpPr>
+            <a:spLocks noGrp="1"/>
+          </p:cNvSpPr>
+          <p:nvPr>
+            <p:ph type="ftr" sz="quarter" idx="3"/>
+          </p:nvPr>
+        </p:nvSpPr>
+        <p:spPr/>
+        <p:txBody>
+          <a:bodyPr/>
+          <a:lstStyle/>
+          <a:p>
+            <a:r>
+              <a:rPr lang="cs-CZ"/>
+              <a:t>www.ictpro.cz</a:t>
+            </a:r>
+            <a:endParaRPr lang="cs-CZ" dirty="0"/>
+          </a:p>
+        </p:txBody>
+      </p:sp>
+      <p:sp>
+        <p:nvSpPr>
+          <p:cNvPr id="4" name="Text 3">
+            <a:extLst>
+              <a:ext uri="{FF2B5EF4-FFF2-40B4-BE49-F238E27FC236}">
+                <a16:creationId xmlns:a16="http://schemas.microsoft.com/office/drawing/2014/main" id="{52526BDF-C143-E0FC-E468-0CAE3EEFE2C4}"/>
+              </a:ext>
+            </a:extLst>
+          </p:cNvPr>
+          <p:cNvSpPr/>
+          <p:nvPr/>
+        </p:nvSpPr>
+        <p:spPr>
+          <a:xfrm>
+            <a:off x="290456" y="806823"/>
+            <a:ext cx="8229600" cy="731520"/>
+          </a:xfrm>
+          <a:prstGeom prst="rect">
+            <a:avLst/>
+          </a:prstGeom>
+          <a:noFill/>
+          <a:ln/>
+        </p:spPr>
+        <p:txBody>
+          <a:bodyPr wrap="square" lIns="0" tIns="0" rIns="0" bIns="0" rtlCol="0" anchor="ctr"/>
+          <a:lstStyle/>
+          <a:p>
+            <a:r>
+              <a:rPr lang="en-US" sz="4800" dirty="0">
+                <a:solidFill>
+                  <a:srgbClr val="3D1C00"/>
+                </a:solidFill>
+                <a:latin typeface="Calibri" panose="020F0502020204030204" pitchFamily="34" charset="0"/>
+                <a:ea typeface="Calibri" panose="020F0502020204030204" pitchFamily="34" charset="0"/>
+                <a:cs typeface="Calibri" panose="020F0502020204030204" pitchFamily="34" charset="0"/>
+              </a:rPr>
+              <a:t>Jak Claude pracuje s vašimi daty</a:t>
+            </a:r>
+          </a:p>
+        </p:txBody>
+      </p:sp>
+      <p:sp>
+        <p:nvSpPr>
+          <p:cNvPr id="5" name="Shape 4">
+            <a:extLst>
+              <a:ext uri="{FF2B5EF4-FFF2-40B4-BE49-F238E27FC236}">
+                <a16:creationId xmlns:a16="http://schemas.microsoft.com/office/drawing/2014/main" id="{409E3994-CF03-3169-BE02-93D987717442}"/>
+              </a:ext>
+            </a:extLst>
+          </p:cNvPr>
+          <p:cNvSpPr/>
+          <p:nvPr/>
+        </p:nvSpPr>
+        <p:spPr>
+          <a:xfrm>
+            <a:off x="747656" y="1995543"/>
+            <a:ext cx="3291840" cy="3474720"/>
+          </a:xfrm>
+          <a:prstGeom prst="rect">
+            <a:avLst/>
+          </a:prstGeom>
+          <a:solidFill>
+            <a:srgbClr val="FFFFFF"/>
+          </a:solidFill>
+          <a:ln/>
+          <a:effectLst>
+            <a:outerShdw blurRad="101600" dist="38100" dir="8100000" algn="bl" rotWithShape="0">
+              <a:srgbClr val="000000">
+                <a:alpha val="10000"/>
+              </a:srgbClr>
+            </a:outerShdw>
+          </a:effectLst>
+        </p:spPr>
+        <p:txBody>
+          <a:bodyPr/>
+          <a:lstStyle/>
+          <a:p>
+            <a:endParaRPr lang="cs-CZ"/>
+          </a:p>
+        </p:txBody>
+      </p:sp>
+      <p:sp>
+        <p:nvSpPr>
+          <p:cNvPr id="6" name="Shape 5">
+            <a:extLst>
+              <a:ext uri="{FF2B5EF4-FFF2-40B4-BE49-F238E27FC236}">
+                <a16:creationId xmlns:a16="http://schemas.microsoft.com/office/drawing/2014/main" id="{5519D195-0D9A-AB8B-9D17-635581AC7DC7}"/>
+              </a:ext>
+            </a:extLst>
+          </p:cNvPr>
+          <p:cNvSpPr/>
+          <p:nvPr/>
+        </p:nvSpPr>
+        <p:spPr>
+          <a:xfrm>
+            <a:off x="747656" y="1995543"/>
+            <a:ext cx="3291840" cy="54864"/>
+          </a:xfrm>
+          <a:prstGeom prst="rect">
+            <a:avLst/>
+          </a:prstGeom>
+          <a:solidFill>
+            <a:srgbClr val="D4A017"/>
+          </a:solidFill>
+          <a:ln/>
+        </p:spPr>
+        <p:txBody>
+          <a:bodyPr/>
+          <a:lstStyle/>
+          <a:p>
+            <a:endParaRPr lang="cs-CZ"/>
+          </a:p>
+        </p:txBody>
+      </p:sp>
+      <p:pic>
+        <p:nvPicPr>
+          <p:cNvPr id="7" name="Image 1" descr="preencoded.png">
+            <a:extLst>
+              <a:ext uri="{FF2B5EF4-FFF2-40B4-BE49-F238E27FC236}">
+                <a16:creationId xmlns:a16="http://schemas.microsoft.com/office/drawing/2014/main" id="{3D807A9A-C521-8D69-81B8-31981DE96767}"/>
+              </a:ext>
+            </a:extLst>
+          </p:cNvPr>
+          <p:cNvPicPr>
+            <a:picLocks noChangeAspect="1"/>
+          </p:cNvPicPr>
+          <p:nvPr/>
+        </p:nvPicPr>
+        <p:blipFill>
+          <a:blip r:embed="rId2"/>
+          <a:stretch>
+            <a:fillRect/>
+          </a:stretch>
+        </p:blipFill>
+        <p:spPr>
+          <a:xfrm>
+            <a:off x="2073536" y="2361303"/>
+            <a:ext cx="640080" cy="640080"/>
+          </a:xfrm>
+          <a:prstGeom prst="rect">
+            <a:avLst/>
+          </a:prstGeom>
+        </p:spPr>
+      </p:pic>
+      <p:sp>
+        <p:nvSpPr>
+          <p:cNvPr id="8" name="Text 6">
+            <a:extLst>
+              <a:ext uri="{FF2B5EF4-FFF2-40B4-BE49-F238E27FC236}">
+                <a16:creationId xmlns:a16="http://schemas.microsoft.com/office/drawing/2014/main" id="{101F3E5A-D91A-90F9-6843-9D33BE4DA924}"/>
+              </a:ext>
+            </a:extLst>
+          </p:cNvPr>
+          <p:cNvSpPr/>
+          <p:nvPr/>
+        </p:nvSpPr>
+        <p:spPr>
+          <a:xfrm>
+            <a:off x="930536" y="3184263"/>
+            <a:ext cx="2926080" cy="457200"/>
+          </a:xfrm>
+          <a:prstGeom prst="rect">
+            <a:avLst/>
+          </a:prstGeom>
+          <a:noFill/>
+          <a:ln/>
+        </p:spPr>
+        <p:txBody>
+          <a:bodyPr wrap="square" lIns="0" tIns="0" rIns="0" bIns="0" rtlCol="0" anchor="ctr"/>
+          <a:lstStyle/>
+          <a:p>
+            <a:pPr marL="0" indent="0" algn="ctr">
+              <a:buNone/>
+            </a:pPr>
+            <a:r>
+              <a:rPr lang="en-US" sz="1800" b="1" dirty="0">
+                <a:solidFill>
+                  <a:srgbClr val="3D1C00"/>
+                </a:solidFill>
+                <a:latin typeface="Calibri" pitchFamily="34" charset="0"/>
+                <a:ea typeface="Calibri" pitchFamily="34" charset="-122"/>
+                <a:cs typeface="Calibri" pitchFamily="34" charset="-120"/>
+              </a:rPr>
+              <a:t>Free / Pro / Max</a:t>
+            </a:r>
+            <a:endParaRPr lang="en-US" sz="1800" dirty="0"/>
+          </a:p>
+        </p:txBody>
+      </p:sp>
+      <p:sp>
+        <p:nvSpPr>
+          <p:cNvPr id="9" name="Text 7">
+            <a:extLst>
+              <a:ext uri="{FF2B5EF4-FFF2-40B4-BE49-F238E27FC236}">
+                <a16:creationId xmlns:a16="http://schemas.microsoft.com/office/drawing/2014/main" id="{CB167268-C524-20CB-6097-A2CE9874D35D}"/>
+              </a:ext>
+            </a:extLst>
+          </p:cNvPr>
+          <p:cNvSpPr/>
+          <p:nvPr/>
+        </p:nvSpPr>
+        <p:spPr>
+          <a:xfrm>
+            <a:off x="1021976" y="3732903"/>
+            <a:ext cx="2743200" cy="822960"/>
+          </a:xfrm>
+          <a:prstGeom prst="rect">
+            <a:avLst/>
+          </a:prstGeom>
+          <a:noFill/>
+          <a:ln/>
+        </p:spPr>
+        <p:txBody>
+          <a:bodyPr wrap="square" lIns="0" tIns="0" rIns="0" bIns="0" rtlCol="0" anchor="ctr"/>
+          <a:lstStyle/>
+          <a:p>
+            <a:pPr indent="0" algn="ctr">
+              <a:buNone/>
+            </a:pPr>
+            <a:r>
+              <a:rPr lang="en-US" sz="1300" dirty="0">
+                <a:solidFill>
+                  <a:srgbClr val="5C3A1E"/>
+                </a:solidFill>
+                <a:latin typeface="Calibri" panose="020F0502020204030204" pitchFamily="34" charset="0"/>
+                <a:ea typeface="Calibri" panose="020F0502020204030204" pitchFamily="34" charset="0"/>
+                <a:cs typeface="Calibri" panose="020F0502020204030204" pitchFamily="34" charset="0"/>
+              </a:rPr>
+              <a:t>Opt-in volba: data k tréningu modelu, nebo ne. Retence 30 dní (ne) nebo 5 let (ano). Citlivá firemní data nedoporučujeme.</a:t>
+            </a:r>
+          </a:p>
+        </p:txBody>
+      </p:sp>
+      <p:sp>
+        <p:nvSpPr>
+          <p:cNvPr id="10" name="Shape 8">
+            <a:extLst>
+              <a:ext uri="{FF2B5EF4-FFF2-40B4-BE49-F238E27FC236}">
+                <a16:creationId xmlns:a16="http://schemas.microsoft.com/office/drawing/2014/main" id="{A97A1924-20D5-C545-16B4-B9AD1B8C0E3F}"/>
+              </a:ext>
+            </a:extLst>
+          </p:cNvPr>
+          <p:cNvSpPr/>
+          <p:nvPr/>
+        </p:nvSpPr>
+        <p:spPr>
+          <a:xfrm>
+            <a:off x="1387736" y="4738743"/>
+            <a:ext cx="2011680" cy="365760"/>
+          </a:xfrm>
+          <a:prstGeom prst="rect">
+            <a:avLst/>
+          </a:prstGeom>
+          <a:solidFill>
+            <a:srgbClr val="F5EFDC"/>
+          </a:solidFill>
+          <a:ln/>
+        </p:spPr>
+        <p:txBody>
+          <a:bodyPr/>
+          <a:lstStyle/>
+          <a:p>
+            <a:endParaRPr lang="cs-CZ"/>
+          </a:p>
+        </p:txBody>
+      </p:sp>
+      <p:sp>
+        <p:nvSpPr>
+          <p:cNvPr id="11" name="Text 9">
+            <a:extLst>
+              <a:ext uri="{FF2B5EF4-FFF2-40B4-BE49-F238E27FC236}">
+                <a16:creationId xmlns:a16="http://schemas.microsoft.com/office/drawing/2014/main" id="{1868E7CC-690F-C378-FF14-86692A75ADA4}"/>
+              </a:ext>
+            </a:extLst>
+          </p:cNvPr>
+          <p:cNvSpPr/>
+          <p:nvPr/>
+        </p:nvSpPr>
+        <p:spPr>
+          <a:xfrm>
+            <a:off x="1387736" y="4738743"/>
+            <a:ext cx="2011680" cy="365760"/>
+          </a:xfrm>
+          <a:prstGeom prst="rect">
+            <a:avLst/>
+          </a:prstGeom>
+          <a:noFill/>
+          <a:ln/>
+        </p:spPr>
+        <p:txBody>
+          <a:bodyPr wrap="square" lIns="0" tIns="0" rIns="0" bIns="0" rtlCol="0" anchor="ctr"/>
+          <a:lstStyle/>
+          <a:p>
+            <a:pPr marL="0" indent="0" algn="ctr">
+              <a:buNone/>
+            </a:pPr>
+            <a:r>
+              <a:rPr lang="en-US" sz="1100" b="1" dirty="0">
+                <a:solidFill>
+                  <a:srgbClr val="B8941A"/>
+                </a:solidFill>
+                <a:latin typeface="Calibri" pitchFamily="34" charset="0"/>
+                <a:ea typeface="Calibri" pitchFamily="34" charset="-122"/>
+                <a:cs typeface="Calibri" pitchFamily="34" charset="-120"/>
+              </a:rPr>
+              <a:t>Trénink: volitelný</a:t>
+            </a:r>
+            <a:endParaRPr lang="en-US" sz="1100" dirty="0"/>
+          </a:p>
+        </p:txBody>
+      </p:sp>
+      <p:sp>
+        <p:nvSpPr>
+          <p:cNvPr id="12" name="Shape 10">
+            <a:extLst>
+              <a:ext uri="{FF2B5EF4-FFF2-40B4-BE49-F238E27FC236}">
+                <a16:creationId xmlns:a16="http://schemas.microsoft.com/office/drawing/2014/main" id="{0B7143C3-D7E0-D4DD-1CE5-E02923E026B0}"/>
+              </a:ext>
+            </a:extLst>
+          </p:cNvPr>
+          <p:cNvSpPr/>
+          <p:nvPr/>
+        </p:nvSpPr>
+        <p:spPr>
+          <a:xfrm>
+            <a:off x="4679576" y="1995543"/>
+            <a:ext cx="3291840" cy="3474720"/>
+          </a:xfrm>
+          <a:prstGeom prst="rect">
+            <a:avLst/>
+          </a:prstGeom>
+          <a:solidFill>
+            <a:srgbClr val="FFFFFF"/>
+          </a:solidFill>
+          <a:ln/>
+          <a:effectLst>
+            <a:outerShdw blurRad="101600" dist="38100" dir="8100000" algn="bl" rotWithShape="0">
+              <a:srgbClr val="000000">
+                <a:alpha val="10000"/>
+              </a:srgbClr>
+            </a:outerShdw>
+          </a:effectLst>
+        </p:spPr>
+        <p:txBody>
+          <a:bodyPr/>
+          <a:lstStyle/>
+          <a:p>
+            <a:endParaRPr lang="cs-CZ"/>
+          </a:p>
+        </p:txBody>
+      </p:sp>
+      <p:sp>
+        <p:nvSpPr>
+          <p:cNvPr id="13" name="Shape 11">
+            <a:extLst>
+              <a:ext uri="{FF2B5EF4-FFF2-40B4-BE49-F238E27FC236}">
+                <a16:creationId xmlns:a16="http://schemas.microsoft.com/office/drawing/2014/main" id="{5301A4C0-A466-6980-58AB-490FEB59B121}"/>
+              </a:ext>
+            </a:extLst>
+          </p:cNvPr>
+          <p:cNvSpPr/>
+          <p:nvPr/>
+        </p:nvSpPr>
+        <p:spPr>
+          <a:xfrm>
+            <a:off x="4679576" y="1995543"/>
+            <a:ext cx="3291840" cy="54864"/>
+          </a:xfrm>
+          <a:prstGeom prst="rect">
+            <a:avLst/>
+          </a:prstGeom>
+          <a:solidFill>
+            <a:srgbClr val="D4A017"/>
+          </a:solidFill>
+          <a:ln/>
+        </p:spPr>
+        <p:txBody>
+          <a:bodyPr/>
+          <a:lstStyle/>
+          <a:p>
+            <a:endParaRPr lang="cs-CZ"/>
+          </a:p>
+        </p:txBody>
+      </p:sp>
+      <p:pic>
+        <p:nvPicPr>
+          <p:cNvPr id="14" name="Image 2" descr="preencoded.png">
+            <a:extLst>
+              <a:ext uri="{FF2B5EF4-FFF2-40B4-BE49-F238E27FC236}">
+                <a16:creationId xmlns:a16="http://schemas.microsoft.com/office/drawing/2014/main" id="{4854E799-A09D-1940-9333-FBA26C2CCC15}"/>
+              </a:ext>
+            </a:extLst>
+          </p:cNvPr>
+          <p:cNvPicPr>
+            <a:picLocks noChangeAspect="1"/>
+          </p:cNvPicPr>
+          <p:nvPr/>
+        </p:nvPicPr>
+        <p:blipFill>
+          <a:blip r:embed="rId3"/>
+          <a:stretch>
+            <a:fillRect/>
+          </a:stretch>
+        </p:blipFill>
+        <p:spPr>
+          <a:xfrm>
+            <a:off x="6005456" y="2361303"/>
+            <a:ext cx="640080" cy="640080"/>
+          </a:xfrm>
+          <a:prstGeom prst="rect">
+            <a:avLst/>
+          </a:prstGeom>
+        </p:spPr>
+      </p:pic>
+      <p:sp>
+        <p:nvSpPr>
+          <p:cNvPr id="15" name="Text 12">
+            <a:extLst>
+              <a:ext uri="{FF2B5EF4-FFF2-40B4-BE49-F238E27FC236}">
+                <a16:creationId xmlns:a16="http://schemas.microsoft.com/office/drawing/2014/main" id="{88A1F0EE-30DB-7168-DA5C-17C536187C2E}"/>
+              </a:ext>
+            </a:extLst>
+          </p:cNvPr>
+          <p:cNvSpPr/>
+          <p:nvPr/>
+        </p:nvSpPr>
+        <p:spPr>
+          <a:xfrm>
+            <a:off x="4862456" y="3184263"/>
+            <a:ext cx="2926080" cy="457200"/>
+          </a:xfrm>
+          <a:prstGeom prst="rect">
+            <a:avLst/>
+          </a:prstGeom>
+          <a:noFill/>
+          <a:ln/>
+        </p:spPr>
+        <p:txBody>
+          <a:bodyPr wrap="square" lIns="0" tIns="0" rIns="0" bIns="0" rtlCol="0" anchor="ctr"/>
+          <a:lstStyle/>
+          <a:p>
+            <a:pPr marL="0" indent="0" algn="ctr">
+              <a:buNone/>
+            </a:pPr>
+            <a:r>
+              <a:rPr lang="en-US" sz="1800" b="1" dirty="0">
+                <a:solidFill>
+                  <a:srgbClr val="3D1C00"/>
+                </a:solidFill>
+                <a:latin typeface="Calibri" pitchFamily="34" charset="0"/>
+                <a:ea typeface="Calibri" pitchFamily="34" charset="-122"/>
+                <a:cs typeface="Calibri" pitchFamily="34" charset="-120"/>
+              </a:rPr>
+              <a:t>Team / Enterprise</a:t>
+            </a:r>
+            <a:endParaRPr lang="en-US" sz="1800" dirty="0"/>
+          </a:p>
+        </p:txBody>
+      </p:sp>
+      <p:sp>
+        <p:nvSpPr>
+          <p:cNvPr id="16" name="Text 13">
+            <a:extLst>
+              <a:ext uri="{FF2B5EF4-FFF2-40B4-BE49-F238E27FC236}">
+                <a16:creationId xmlns:a16="http://schemas.microsoft.com/office/drawing/2014/main" id="{1DC5105E-345C-AF4D-3007-2C2A6D081847}"/>
+              </a:ext>
+            </a:extLst>
+          </p:cNvPr>
+          <p:cNvSpPr/>
+          <p:nvPr/>
+        </p:nvSpPr>
+        <p:spPr>
+          <a:xfrm>
+            <a:off x="4953896" y="3732903"/>
+            <a:ext cx="2743200" cy="822960"/>
+          </a:xfrm>
+          <a:prstGeom prst="rect">
+            <a:avLst/>
+          </a:prstGeom>
+          <a:noFill/>
+          <a:ln/>
+        </p:spPr>
+        <p:txBody>
+          <a:bodyPr wrap="square" lIns="0" tIns="0" rIns="0" bIns="0" rtlCol="0" anchor="ctr"/>
+          <a:lstStyle/>
+          <a:p>
+            <a:pPr algn="ctr"/>
+            <a:r>
+              <a:rPr lang="en-US" sz="1300" dirty="0">
+                <a:solidFill>
+                  <a:srgbClr val="5C3A1E"/>
+                </a:solidFill>
+                <a:latin typeface="Calibri" panose="020F0502020204030204" pitchFamily="34" charset="0"/>
+                <a:ea typeface="Calibri" panose="020F0502020204030204" pitchFamily="34" charset="0"/>
+                <a:cs typeface="Calibri" panose="020F0502020204030204" pitchFamily="34" charset="0"/>
+              </a:rPr>
+              <a:t>Data se nikdy nepoužívají k tréningu. DPA k dispozici. SOC 2, ISO 27001. Retence 30 dní. </a:t>
+            </a:r>
+          </a:p>
+        </p:txBody>
+      </p:sp>
+      <p:sp>
+        <p:nvSpPr>
+          <p:cNvPr id="17" name="Shape 14">
+            <a:extLst>
+              <a:ext uri="{FF2B5EF4-FFF2-40B4-BE49-F238E27FC236}">
+                <a16:creationId xmlns:a16="http://schemas.microsoft.com/office/drawing/2014/main" id="{C2FCB407-0CEE-25C6-432B-56B309C7FE21}"/>
+              </a:ext>
+            </a:extLst>
+          </p:cNvPr>
+          <p:cNvSpPr/>
+          <p:nvPr/>
+        </p:nvSpPr>
+        <p:spPr>
+          <a:xfrm>
+            <a:off x="5319656" y="4738743"/>
+            <a:ext cx="2011680" cy="365760"/>
+          </a:xfrm>
+          <a:prstGeom prst="rect">
+            <a:avLst/>
+          </a:prstGeom>
+          <a:solidFill>
+            <a:srgbClr val="F5EFDC"/>
+          </a:solidFill>
+          <a:ln/>
+        </p:spPr>
+        <p:txBody>
+          <a:bodyPr/>
+          <a:lstStyle/>
+          <a:p>
+            <a:endParaRPr lang="cs-CZ"/>
+          </a:p>
+        </p:txBody>
+      </p:sp>
+      <p:sp>
+        <p:nvSpPr>
+          <p:cNvPr id="18" name="Text 15">
+            <a:extLst>
+              <a:ext uri="{FF2B5EF4-FFF2-40B4-BE49-F238E27FC236}">
+                <a16:creationId xmlns:a16="http://schemas.microsoft.com/office/drawing/2014/main" id="{CFACCE76-01FD-8FE8-B3E7-726E5E211423}"/>
+              </a:ext>
+            </a:extLst>
+          </p:cNvPr>
+          <p:cNvSpPr/>
+          <p:nvPr/>
+        </p:nvSpPr>
+        <p:spPr>
+          <a:xfrm>
+            <a:off x="5319656" y="4738743"/>
+            <a:ext cx="2011680" cy="365760"/>
+          </a:xfrm>
+          <a:prstGeom prst="rect">
+            <a:avLst/>
+          </a:prstGeom>
+          <a:noFill/>
+          <a:ln/>
+        </p:spPr>
+        <p:txBody>
+          <a:bodyPr wrap="square" lIns="0" tIns="0" rIns="0" bIns="0" rtlCol="0" anchor="ctr"/>
+          <a:lstStyle/>
+          <a:p>
+            <a:pPr marL="0" indent="0" algn="ctr">
+              <a:buNone/>
+            </a:pPr>
+            <a:r>
+              <a:rPr lang="en-US" sz="1100" b="1" dirty="0">
+                <a:solidFill>
+                  <a:srgbClr val="B8941A"/>
+                </a:solidFill>
+                <a:latin typeface="Calibri" pitchFamily="34" charset="0"/>
+                <a:ea typeface="Calibri" pitchFamily="34" charset="-122"/>
+                <a:cs typeface="Calibri" pitchFamily="34" charset="-120"/>
+              </a:rPr>
+              <a:t>Trénink: nikdy</a:t>
+            </a:r>
+            <a:endParaRPr lang="en-US" sz="1100" dirty="0"/>
+          </a:p>
+        </p:txBody>
+      </p:sp>
+      <p:sp>
+        <p:nvSpPr>
+          <p:cNvPr id="19" name="Shape 16">
+            <a:extLst>
+              <a:ext uri="{FF2B5EF4-FFF2-40B4-BE49-F238E27FC236}">
+                <a16:creationId xmlns:a16="http://schemas.microsoft.com/office/drawing/2014/main" id="{2229C8A6-E6CE-6E02-3C8B-BF18575CDFEF}"/>
+              </a:ext>
+            </a:extLst>
+          </p:cNvPr>
+          <p:cNvSpPr/>
+          <p:nvPr/>
+        </p:nvSpPr>
+        <p:spPr>
+          <a:xfrm>
+            <a:off x="8611496" y="1995543"/>
+            <a:ext cx="3291840" cy="3474720"/>
+          </a:xfrm>
+          <a:prstGeom prst="rect">
+            <a:avLst/>
+          </a:prstGeom>
+          <a:solidFill>
+            <a:srgbClr val="FFFFFF"/>
+          </a:solidFill>
+          <a:ln/>
+          <a:effectLst>
+            <a:outerShdw blurRad="101600" dist="38100" dir="8100000" algn="bl" rotWithShape="0">
+              <a:srgbClr val="000000">
+                <a:alpha val="10000"/>
+              </a:srgbClr>
+            </a:outerShdw>
+          </a:effectLst>
+        </p:spPr>
+        <p:txBody>
+          <a:bodyPr/>
+          <a:lstStyle/>
+          <a:p>
+            <a:endParaRPr lang="cs-CZ"/>
+          </a:p>
+        </p:txBody>
+      </p:sp>
+      <p:sp>
+        <p:nvSpPr>
+          <p:cNvPr id="20" name="Shape 17">
+            <a:extLst>
+              <a:ext uri="{FF2B5EF4-FFF2-40B4-BE49-F238E27FC236}">
+                <a16:creationId xmlns:a16="http://schemas.microsoft.com/office/drawing/2014/main" id="{0845D0BD-D110-5B10-4EAC-C801C42BB277}"/>
+              </a:ext>
+            </a:extLst>
+          </p:cNvPr>
+          <p:cNvSpPr/>
+          <p:nvPr/>
+        </p:nvSpPr>
+        <p:spPr>
+          <a:xfrm>
+            <a:off x="8611496" y="1995543"/>
+            <a:ext cx="3291840" cy="54864"/>
+          </a:xfrm>
+          <a:prstGeom prst="rect">
+            <a:avLst/>
+          </a:prstGeom>
+          <a:solidFill>
+            <a:srgbClr val="D4A017"/>
+          </a:solidFill>
+          <a:ln/>
+        </p:spPr>
+        <p:txBody>
+          <a:bodyPr/>
+          <a:lstStyle/>
+          <a:p>
+            <a:endParaRPr lang="cs-CZ"/>
+          </a:p>
+        </p:txBody>
+      </p:sp>
+      <p:pic>
+        <p:nvPicPr>
+          <p:cNvPr id="21" name="Image 3" descr="preencoded.png">
+            <a:extLst>
+              <a:ext uri="{FF2B5EF4-FFF2-40B4-BE49-F238E27FC236}">
+                <a16:creationId xmlns:a16="http://schemas.microsoft.com/office/drawing/2014/main" id="{F51F199E-F075-A5B5-728A-6080A548EFB2}"/>
+              </a:ext>
+            </a:extLst>
+          </p:cNvPr>
+          <p:cNvPicPr>
+            <a:picLocks noChangeAspect="1"/>
+          </p:cNvPicPr>
+          <p:nvPr/>
+        </p:nvPicPr>
+        <p:blipFill>
+          <a:blip r:embed="rId4"/>
+          <a:stretch>
+            <a:fillRect/>
+          </a:stretch>
+        </p:blipFill>
+        <p:spPr>
+          <a:xfrm>
+            <a:off x="9937376" y="2361303"/>
+            <a:ext cx="640080" cy="640080"/>
+          </a:xfrm>
+          <a:prstGeom prst="rect">
+            <a:avLst/>
+          </a:prstGeom>
+        </p:spPr>
+      </p:pic>
+      <p:sp>
+        <p:nvSpPr>
+          <p:cNvPr id="22" name="Text 18">
+            <a:extLst>
+              <a:ext uri="{FF2B5EF4-FFF2-40B4-BE49-F238E27FC236}">
+                <a16:creationId xmlns:a16="http://schemas.microsoft.com/office/drawing/2014/main" id="{8823C584-3F9E-A37E-8E17-886A52D4512A}"/>
+              </a:ext>
+            </a:extLst>
+          </p:cNvPr>
+          <p:cNvSpPr/>
+          <p:nvPr/>
+        </p:nvSpPr>
+        <p:spPr>
+          <a:xfrm>
+            <a:off x="8794376" y="3184263"/>
+            <a:ext cx="2926080" cy="457200"/>
+          </a:xfrm>
+          <a:prstGeom prst="rect">
+            <a:avLst/>
+          </a:prstGeom>
+          <a:noFill/>
+          <a:ln/>
+        </p:spPr>
+        <p:txBody>
+          <a:bodyPr wrap="square" lIns="0" tIns="0" rIns="0" bIns="0" rtlCol="0" anchor="ctr"/>
+          <a:lstStyle/>
+          <a:p>
+            <a:pPr marL="0" indent="0" algn="ctr">
+              <a:buNone/>
+            </a:pPr>
+            <a:r>
+              <a:rPr lang="en-US" sz="1800" b="1" dirty="0">
+                <a:solidFill>
+                  <a:srgbClr val="3D1C00"/>
+                </a:solidFill>
+                <a:latin typeface="Calibri" pitchFamily="34" charset="0"/>
+                <a:ea typeface="Calibri" pitchFamily="34" charset="-122"/>
+                <a:cs typeface="Calibri" pitchFamily="34" charset="-120"/>
+              </a:rPr>
+              <a:t>API</a:t>
+            </a:r>
+            <a:endParaRPr lang="en-US" sz="1800" dirty="0"/>
+          </a:p>
+        </p:txBody>
+      </p:sp>
+      <p:sp>
+        <p:nvSpPr>
+          <p:cNvPr id="23" name="Text 19">
+            <a:extLst>
+              <a:ext uri="{FF2B5EF4-FFF2-40B4-BE49-F238E27FC236}">
+                <a16:creationId xmlns:a16="http://schemas.microsoft.com/office/drawing/2014/main" id="{29CBBC8C-05DE-F906-7B48-1A8C82362355}"/>
+              </a:ext>
+            </a:extLst>
+          </p:cNvPr>
+          <p:cNvSpPr/>
+          <p:nvPr/>
+        </p:nvSpPr>
+        <p:spPr>
+          <a:xfrm>
+            <a:off x="8885816" y="3732903"/>
+            <a:ext cx="2743200" cy="822960"/>
+          </a:xfrm>
+          <a:prstGeom prst="rect">
+            <a:avLst/>
+          </a:prstGeom>
+          <a:noFill/>
+          <a:ln/>
+        </p:spPr>
+        <p:txBody>
+          <a:bodyPr wrap="square" lIns="0" tIns="0" rIns="0" bIns="0" rtlCol="0" anchor="ctr"/>
+          <a:lstStyle/>
+          <a:p>
+            <a:pPr indent="0" algn="ctr">
+              <a:buNone/>
+            </a:pPr>
+            <a:r>
+              <a:rPr lang="en-US" sz="1300" dirty="0">
+                <a:solidFill>
+                  <a:srgbClr val="5C3A1E"/>
+                </a:solidFill>
+                <a:latin typeface="Calibri" panose="020F0502020204030204" pitchFamily="34" charset="0"/>
+                <a:ea typeface="Calibri" panose="020F0502020204030204" pitchFamily="34" charset="0"/>
+                <a:cs typeface="Calibri" panose="020F0502020204030204" pitchFamily="34" charset="0"/>
+              </a:rPr>
+              <a:t>Zero Data Retention: na straně Anthropic se neuchovává vůbec nic. Pro maximální kontrolu nad daty.</a:t>
+            </a:r>
+          </a:p>
+        </p:txBody>
+      </p:sp>
+      <p:sp>
+        <p:nvSpPr>
+          <p:cNvPr id="24" name="Shape 20">
+            <a:extLst>
+              <a:ext uri="{FF2B5EF4-FFF2-40B4-BE49-F238E27FC236}">
+                <a16:creationId xmlns:a16="http://schemas.microsoft.com/office/drawing/2014/main" id="{D63B15B0-0B10-9A1B-D83B-0910C7964C66}"/>
+              </a:ext>
+            </a:extLst>
+          </p:cNvPr>
+          <p:cNvSpPr/>
+          <p:nvPr/>
+        </p:nvSpPr>
+        <p:spPr>
+          <a:xfrm>
+            <a:off x="9251576" y="4738743"/>
+            <a:ext cx="2011680" cy="365760"/>
+          </a:xfrm>
+          <a:prstGeom prst="rect">
+            <a:avLst/>
+          </a:prstGeom>
+          <a:solidFill>
+            <a:srgbClr val="F5EFDC"/>
+          </a:solidFill>
+          <a:ln/>
+        </p:spPr>
+        <p:txBody>
+          <a:bodyPr/>
+          <a:lstStyle/>
+          <a:p>
+            <a:endParaRPr lang="cs-CZ"/>
+          </a:p>
+        </p:txBody>
+      </p:sp>
+      <p:sp>
+        <p:nvSpPr>
+          <p:cNvPr id="25" name="Text 21">
+            <a:extLst>
+              <a:ext uri="{FF2B5EF4-FFF2-40B4-BE49-F238E27FC236}">
+                <a16:creationId xmlns:a16="http://schemas.microsoft.com/office/drawing/2014/main" id="{13037442-72AC-4E63-05AE-928F6548CF7F}"/>
+              </a:ext>
+            </a:extLst>
+          </p:cNvPr>
+          <p:cNvSpPr/>
+          <p:nvPr/>
+        </p:nvSpPr>
+        <p:spPr>
+          <a:xfrm>
+            <a:off x="9251576" y="4738743"/>
+            <a:ext cx="2011680" cy="365760"/>
+          </a:xfrm>
+          <a:prstGeom prst="rect">
+            <a:avLst/>
+          </a:prstGeom>
+          <a:noFill/>
+          <a:ln/>
+        </p:spPr>
+        <p:txBody>
+          <a:bodyPr wrap="square" lIns="0" tIns="0" rIns="0" bIns="0" rtlCol="0" anchor="ctr"/>
+          <a:lstStyle/>
+          <a:p>
+            <a:pPr marL="0" indent="0" algn="ctr">
+              <a:buNone/>
+            </a:pPr>
+            <a:r>
+              <a:rPr lang="en-US" sz="1100" b="1" dirty="0">
+                <a:solidFill>
+                  <a:srgbClr val="B8941A"/>
+                </a:solidFill>
+                <a:latin typeface="Calibri" pitchFamily="34" charset="0"/>
+                <a:ea typeface="Calibri" pitchFamily="34" charset="-122"/>
+                <a:cs typeface="Calibri" pitchFamily="34" charset="-120"/>
+              </a:rPr>
+              <a:t>Trénink: nikdy</a:t>
+            </a:r>
+            <a:endParaRPr lang="en-US" sz="1100" dirty="0"/>
+          </a:p>
+        </p:txBody>
+      </p:sp>
+    </p:spTree>
+    <p:extLst>
+      <p:ext uri="{BB962C8B-B14F-4D97-AF65-F5344CB8AC3E}">
+        <p14:creationId xmlns:p14="http://schemas.microsoft.com/office/powerpoint/2010/main" val="100043114"/>
+      </p:ext>
+    </p:extLst>
+  </p:cSld>
+  <p:clrMapOvr>
+    <a:masterClrMapping/>
+  </p:clrMapOvr>
+</p:sld>
+</file>
+
+<file path=ppt/slides/slide8.xml><?xml version="1.0" encoding="utf-8"?>
+<p:sld xmlns:a="http://schemas.openxmlformats.org/drawingml/2006/main" xmlns:r="http://schemas.openxmlformats.org/officeDocument/2006/relationships" xmlns:p="http://schemas.openxmlformats.org/presentationml/2006/main">
+  <p:cSld>
+    <p:spTree>
+      <p:nvGrpSpPr>
+        <p:cNvPr id="1" name=""/>
+        <p:cNvGrpSpPr/>
+        <p:nvPr/>
+      </p:nvGrpSpPr>
+      <p:grpSpPr>
+        <a:xfrm>
+          <a:off x="0" y="0"/>
+          <a:ext cx="0" cy="0"/>
+          <a:chOff x="0" y="0"/>
+          <a:chExt cx="0" cy="0"/>
+        </a:xfrm>
+      </p:grpSpPr>
+      <p:sp>
+        <p:nvSpPr>
+          <p:cNvPr id="2" name="Slide Number Placeholder 1">
+            <a:extLst>
+              <a:ext uri="{FF2B5EF4-FFF2-40B4-BE49-F238E27FC236}">
+                <a16:creationId xmlns:a16="http://schemas.microsoft.com/office/drawing/2014/main" id="{26CD56B6-34BA-477A-1A8A-EB426A9560D5}"/>
+              </a:ext>
+            </a:extLst>
+          </p:cNvPr>
+          <p:cNvSpPr>
+            <a:spLocks noGrp="1"/>
+          </p:cNvSpPr>
+          <p:nvPr>
+            <p:ph type="sldNum" sz="quarter" idx="12"/>
+          </p:nvPr>
+        </p:nvSpPr>
+        <p:spPr/>
+        <p:txBody>
+          <a:bodyPr/>
+          <a:lstStyle/>
+          <a:p>
+            <a:fld id="{739B250B-A78B-470B-9267-5328930F7291}" type="slidenum">
+              <a:rPr lang="cs-CZ" smtClean="0"/>
+              <a:t>8</a:t>
+            </a:fld>
+            <a:endParaRPr lang="cs-CZ"/>
+          </a:p>
+        </p:txBody>
+      </p:sp>
+      <p:sp>
+        <p:nvSpPr>
+          <p:cNvPr id="3" name="Footer Placeholder 2">
+            <a:extLst>
+              <a:ext uri="{FF2B5EF4-FFF2-40B4-BE49-F238E27FC236}">
+                <a16:creationId xmlns:a16="http://schemas.microsoft.com/office/drawing/2014/main" id="{8AF017E5-C3AC-54F0-CB47-3970120FB6A6}"/>
+              </a:ext>
+            </a:extLst>
+          </p:cNvPr>
+          <p:cNvSpPr>
+            <a:spLocks noGrp="1"/>
+          </p:cNvSpPr>
+          <p:nvPr>
+            <p:ph type="ftr" sz="quarter" idx="3"/>
+          </p:nvPr>
+        </p:nvSpPr>
+        <p:spPr/>
+        <p:txBody>
+          <a:bodyPr/>
+          <a:lstStyle/>
+          <a:p>
+            <a:r>
+              <a:rPr lang="cs-CZ"/>
+              <a:t>www.ictpro.cz</a:t>
+            </a:r>
+            <a:endParaRPr lang="cs-CZ" dirty="0"/>
+          </a:p>
+        </p:txBody>
+      </p:sp>
+      <p:sp>
+        <p:nvSpPr>
+          <p:cNvPr id="4" name="Title 1">
+            <a:extLst>
+              <a:ext uri="{FF2B5EF4-FFF2-40B4-BE49-F238E27FC236}">
+                <a16:creationId xmlns:a16="http://schemas.microsoft.com/office/drawing/2014/main" id="{DD98E92E-BF7E-7DCD-B61B-F7D1B1B6AC6A}"/>
+              </a:ext>
+            </a:extLst>
+          </p:cNvPr>
+          <p:cNvSpPr txBox="1">
+            <a:spLocks/>
+          </p:cNvSpPr>
+          <p:nvPr/>
+        </p:nvSpPr>
+        <p:spPr>
+          <a:xfrm>
+            <a:off x="1326777" y="3193675"/>
+            <a:ext cx="9144000" cy="1535487"/>
+          </a:xfrm>
+          <a:prstGeom prst="rect">
+            <a:avLst/>
+          </a:prstGeom>
+        </p:spPr>
+        <p:txBody>
+          <a:bodyPr>
+            <a:normAutofit fontScale="97500" lnSpcReduction="10000"/>
+          </a:bodyPr>
+          <a:lstStyle>
+            <a:lvl1pPr algn="l" defTabSz="914400" rtl="0" eaLnBrk="1" latinLnBrk="0" hangingPunct="1">
+              <a:lnSpc>
+                <a:spcPct val="90000"/>
+              </a:lnSpc>
+              <a:spcBef>
+                <a:spcPct val="0"/>
+              </a:spcBef>
+              <a:buNone/>
+              <a:defRPr sz="4400" kern="1200">
+                <a:solidFill>
+                  <a:schemeClr val="accent3"/>
+                </a:solidFill>
+                <a:latin typeface="Calibri" panose="020F0502020204030204" pitchFamily="34" charset="0"/>
+                <a:ea typeface="+mj-ea"/>
+                <a:cs typeface="Calibri" panose="020F0502020204030204" pitchFamily="34" charset="0"/>
+              </a:defRPr>
+            </a:lvl1pPr>
+            <a:lvl2pPr eaLnBrk="1" hangingPunct="1">
+              <a:defRPr>
+                <a:solidFill>
+                  <a:schemeClr val="tx2"/>
+                </a:solidFill>
+              </a:defRPr>
+            </a:lvl2pPr>
+            <a:lvl3pPr eaLnBrk="1" hangingPunct="1">
+              <a:defRPr>
+                <a:solidFill>
+                  <a:schemeClr val="tx2"/>
+                </a:solidFill>
+              </a:defRPr>
+            </a:lvl3pPr>
+            <a:lvl4pPr eaLnBrk="1" hangingPunct="1">
+              <a:defRPr>
+                <a:solidFill>
+                  <a:schemeClr val="tx2"/>
+                </a:solidFill>
+              </a:defRPr>
+            </a:lvl4pPr>
+            <a:lvl5pPr eaLnBrk="1" hangingPunct="1">
+              <a:defRPr>
+                <a:solidFill>
+                  <a:schemeClr val="tx2"/>
+                </a:solidFill>
+              </a:defRPr>
+            </a:lvl5pPr>
+            <a:lvl6pPr eaLnBrk="1" hangingPunct="1">
+              <a:defRPr>
+                <a:solidFill>
+                  <a:schemeClr val="tx2"/>
+                </a:solidFill>
+              </a:defRPr>
+            </a:lvl6pPr>
+            <a:lvl7pPr eaLnBrk="1" hangingPunct="1">
+              <a:defRPr>
+                <a:solidFill>
+                  <a:schemeClr val="tx2"/>
+                </a:solidFill>
+              </a:defRPr>
+            </a:lvl7pPr>
+            <a:lvl8pPr eaLnBrk="1" hangingPunct="1">
+              <a:defRPr>
+                <a:solidFill>
+                  <a:schemeClr val="tx2"/>
+                </a:solidFill>
+              </a:defRPr>
+            </a:lvl8pPr>
+            <a:lvl9pPr eaLnBrk="1" hangingPunct="1">
+              <a:defRPr>
+                <a:solidFill>
+                  <a:schemeClr val="tx2"/>
+                </a:solidFill>
+              </a:defRPr>
+            </a:lvl9pPr>
+          </a:lstStyle>
+          <a:p>
+            <a:pPr algn="ctr"/>
+            <a:r>
+              <a:rPr lang="cs-CZ" sz="2800" b="1" dirty="0">
+                <a:solidFill>
+                  <a:srgbClr val="D4A017"/>
+                </a:solidFill>
+              </a:rPr>
+              <a:t>Chcete se naučit víc?</a:t>
+            </a:r>
+          </a:p>
+          <a:p>
+            <a:pPr algn="ctr"/>
+            <a:endParaRPr lang="cs-CZ" sz="1200" dirty="0"/>
+          </a:p>
+          <a:p>
+            <a:pPr algn="ctr"/>
+            <a:r>
+              <a:rPr lang="cs-CZ" sz="2200" b="1" dirty="0"/>
+              <a:t>Kurz Claude AI</a:t>
+            </a:r>
+          </a:p>
+          <a:p>
+            <a:pPr algn="ctr"/>
+            <a:r>
+              <a:rPr lang="cs-CZ" sz="2000" dirty="0"/>
+              <a:t>Vibe coding a tvorba aplikací bez programování</a:t>
+            </a:r>
+          </a:p>
+          <a:p>
+            <a:pPr algn="ctr"/>
+            <a:endParaRPr lang="cs-CZ" sz="1200" dirty="0"/>
+          </a:p>
+          <a:p>
+            <a:pPr algn="ctr"/>
+            <a:r>
+              <a:rPr lang="cs-CZ" sz="1600" dirty="0">
+                <a:solidFill>
+                  <a:srgbClr val="5C3A1E"/>
+                </a:solidFill>
+              </a:rPr>
+              <a:t>Podrobnosti a registrace: www.skoleni-ict.cz (kód kurzu CLVC)</a:t>
+            </a:r>
+          </a:p>
+        </p:txBody>
+      </p:sp>
+    </p:spTree>
+    <p:extLst>
+      <p:ext uri="{BB962C8B-B14F-4D97-AF65-F5344CB8AC3E}">
+        <p14:creationId xmlns:p14="http://schemas.microsoft.com/office/powerpoint/2010/main" val="4134111022"/>
+      </p:ext>
+    </p:extLst>
+  </p:cSld>
+  <p:clrMapOvr>
+    <a:masterClrMapping/>
+  </p:clrMapOvr>
+</p:sld>
+</file>
+
+<file path=ppt/slides/slide9.xml><?xml version="1.0" encoding="utf-8"?>
+<p:sld xmlns:a="http://schemas.openxmlformats.org/drawingml/2006/main" xmlns:r="http://schemas.openxmlformats.org/officeDocument/2006/relationships" xmlns:p="http://schemas.openxmlformats.org/presentationml/2006/main">
+  <p:cSld>
+    <p:spTree>
+      <p:nvGrpSpPr>
+        <p:cNvPr id="1" name=""/>
+        <p:cNvGrpSpPr/>
+        <p:nvPr/>
+      </p:nvGrpSpPr>
+      <p:grpSpPr>
+        <a:xfrm>
+          <a:off x="0" y="0"/>
+          <a:ext cx="0" cy="0"/>
+          <a:chOff x="0" y="0"/>
+          <a:chExt cx="0" cy="0"/>
+        </a:xfrm>
+      </p:grpSpPr>
+      <p:sp>
+        <p:nvSpPr>
+          <p:cNvPr id="2" name="Slide Number Placeholder 1">
+            <a:extLst>
+              <a:ext uri="{FF2B5EF4-FFF2-40B4-BE49-F238E27FC236}">
+                <a16:creationId xmlns:a16="http://schemas.microsoft.com/office/drawing/2014/main" id="{26CD56B6-34BA-477A-1A8A-EB426A9560D5}"/>
+              </a:ext>
+            </a:extLst>
+          </p:cNvPr>
+          <p:cNvSpPr>
+            <a:spLocks noGrp="1"/>
+          </p:cNvSpPr>
+          <p:nvPr>
+            <p:ph type="sldNum" sz="quarter" idx="12"/>
+          </p:nvPr>
+        </p:nvSpPr>
+        <p:spPr/>
+        <p:txBody>
+          <a:bodyPr/>
+          <a:lstStyle/>
+          <a:p>
+            <a:fld id="{739B250B-A78B-470B-9267-5328930F7291}" type="slidenum">
+              <a:rPr lang="cs-CZ" smtClean="0"/>
+              <a:t>9</a:t>
             </a:fld>
             <a:endParaRPr lang="cs-CZ"/>
           </a:p>
@@ -11913,6 +13132,21 @@
 </file>
 
 <file path=customXml/item1.xml><?xml version="1.0" encoding="utf-8"?>
+<?mso-contentType ?>
+<FormTemplates xmlns="http://schemas.microsoft.com/sharepoint/v3/contenttype/forms">
+  <Display>DocumentLibraryForm</Display>
+  <Edit>DocumentLibraryForm</Edit>
+  <New>DocumentLibraryForm</New>
+</FormTemplates>
+</file>
+
+<file path=customXml/item2.xml><?xml version="1.0" encoding="utf-8"?>
+<p:properties xmlns:p="http://schemas.microsoft.com/office/2006/metadata/properties" xmlns:xsi="http://www.w3.org/2001/XMLSchema-instance" xmlns:pc="http://schemas.microsoft.com/office/infopath/2007/PartnerControls">
+  <documentManagement/>
+</p:properties>
+</file>
+
+<file path=customXml/item3.xml><?xml version="1.0" encoding="utf-8"?>
 <ct:contentTypeSchema xmlns:ct="http://schemas.microsoft.com/office/2006/metadata/contentType" xmlns:ma="http://schemas.microsoft.com/office/2006/metadata/properties/metaAttributes" ct:_="" ma:_="" ma:contentTypeName="Dokument" ma:contentTypeID="0x010100C8810D8C24914442A7D0C3247B66797D" ma:contentTypeVersion="14" ma:contentTypeDescription="Vytvoří nový dokument" ma:contentTypeScope="" ma:versionID="f28f764744a7091f964f30f2fcd9069a">
   <xsd:schema xmlns:xsd="http://www.w3.org/2001/XMLSchema" xmlns:xs="http://www.w3.org/2001/XMLSchema" xmlns:p="http://schemas.microsoft.com/office/2006/metadata/properties" xmlns:ns3="12f37db9-297f-41b2-acf8-2f2b45a5fdde" xmlns:ns4="aa812ec4-c030-4fbe-b9e3-30e7dc1e6e7a" targetNamespace="http://schemas.microsoft.com/office/2006/metadata/properties" ma:root="true" ma:fieldsID="eac2558e49013862501672f74a7b749a" ns3:_="" ns4:_="">
     <xsd:import namespace="12f37db9-297f-41b2-acf8-2f2b45a5fdde"/>
@@ -12141,36 +13375,10 @@
 </ct:contentTypeSchema>
 </file>
 
-<file path=customXml/item2.xml><?xml version="1.0" encoding="utf-8"?>
-<p:properties xmlns:p="http://schemas.microsoft.com/office/2006/metadata/properties" xmlns:xsi="http://www.w3.org/2001/XMLSchema-instance" xmlns:pc="http://schemas.microsoft.com/office/infopath/2007/PartnerControls">
-  <documentManagement/>
-</p:properties>
-</file>
-
-<file path=customXml/item3.xml><?xml version="1.0" encoding="utf-8"?>
-<?mso-contentType ?>
-<FormTemplates xmlns="http://schemas.microsoft.com/sharepoint/v3/contenttype/forms">
-  <Display>DocumentLibraryForm</Display>
-  <Edit>DocumentLibraryForm</Edit>
-  <New>DocumentLibraryForm</New>
-</FormTemplates>
-</file>
-
 <file path=customXml/itemProps1.xml><?xml version="1.0" encoding="utf-8"?>
-<ds:datastoreItem xmlns:ds="http://schemas.openxmlformats.org/officeDocument/2006/customXml" ds:itemID="{F31EF517-19AD-43E6-9995-91F26B2D2EC8}">
+<ds:datastoreItem xmlns:ds="http://schemas.openxmlformats.org/officeDocument/2006/customXml" ds:itemID="{F001DAC3-A30D-4F9E-9D9C-0A9ED19A34E2}">
   <ds:schemaRefs>
-    <ds:schemaRef ds:uri="http://schemas.microsoft.com/office/2006/metadata/contentType"/>
-    <ds:schemaRef ds:uri="http://schemas.microsoft.com/office/2006/metadata/properties/metaAttributes"/>
-    <ds:schemaRef ds:uri="http://www.w3.org/2001/XMLSchema"/>
-    <ds:schemaRef ds:uri="http://schemas.microsoft.com/office/2006/metadata/properties"/>
-    <ds:schemaRef ds:uri="12f37db9-297f-41b2-acf8-2f2b45a5fdde"/>
-    <ds:schemaRef ds:uri="aa812ec4-c030-4fbe-b9e3-30e7dc1e6e7a"/>
-    <ds:schemaRef ds:uri="http://schemas.microsoft.com/office/2006/documentManagement/types"/>
-    <ds:schemaRef ds:uri="http://schemas.microsoft.com/office/infopath/2007/PartnerControls"/>
-    <ds:schemaRef ds:uri="http://schemas.openxmlformats.org/package/2006/metadata/core-properties"/>
-    <ds:schemaRef ds:uri="http://purl.org/dc/elements/1.1/"/>
-    <ds:schemaRef ds:uri="http://purl.org/dc/terms/"/>
-    <ds:schemaRef ds:uri="http://schemas.microsoft.com/internal/obd"/>
+    <ds:schemaRef ds:uri="http://schemas.microsoft.com/sharepoint/v3/contenttype/forms"/>
   </ds:schemaRefs>
 </ds:datastoreItem>
 </file>
@@ -12193,9 +13401,20 @@
 </file>
 
 <file path=customXml/itemProps3.xml><?xml version="1.0" encoding="utf-8"?>
-<ds:datastoreItem xmlns:ds="http://schemas.openxmlformats.org/officeDocument/2006/customXml" ds:itemID="{F001DAC3-A30D-4F9E-9D9C-0A9ED19A34E2}">
+<ds:datastoreItem xmlns:ds="http://schemas.openxmlformats.org/officeDocument/2006/customXml" ds:itemID="{F31EF517-19AD-43E6-9995-91F26B2D2EC8}">
   <ds:schemaRefs>
-    <ds:schemaRef ds:uri="http://schemas.microsoft.com/sharepoint/v3/contenttype/forms"/>
+    <ds:schemaRef ds:uri="http://schemas.microsoft.com/office/2006/metadata/contentType"/>
+    <ds:schemaRef ds:uri="http://schemas.microsoft.com/office/2006/metadata/properties/metaAttributes"/>
+    <ds:schemaRef ds:uri="http://www.w3.org/2001/XMLSchema"/>
+    <ds:schemaRef ds:uri="http://schemas.microsoft.com/office/2006/metadata/properties"/>
+    <ds:schemaRef ds:uri="12f37db9-297f-41b2-acf8-2f2b45a5fdde"/>
+    <ds:schemaRef ds:uri="aa812ec4-c030-4fbe-b9e3-30e7dc1e6e7a"/>
+    <ds:schemaRef ds:uri="http://schemas.microsoft.com/office/2006/documentManagement/types"/>
+    <ds:schemaRef ds:uri="http://schemas.microsoft.com/office/infopath/2007/PartnerControls"/>
+    <ds:schemaRef ds:uri="http://schemas.openxmlformats.org/package/2006/metadata/core-properties"/>
+    <ds:schemaRef ds:uri="http://purl.org/dc/elements/1.1/"/>
+    <ds:schemaRef ds:uri="http://purl.org/dc/terms/"/>
+    <ds:schemaRef ds:uri="http://schemas.microsoft.com/internal/obd"/>
   </ds:schemaRefs>
 </ds:datastoreItem>
 </file>